--- a/examples/real/fixtures/milleleaf-deck.libreoffice-resaved.pptx
+++ b/examples/real/fixtures/milleleaf-deck.libreoffice-resaved.pptx
@@ -9205,7 +9205,7 @@
       </p:grpSpPr>
       <p:sp>
         <p:nvSpPr>
-          <p:cNvPr id="73" name="ox:e17c8f5b-124a-538d-8210-832d1d49cd0d"/>
+          <p:cNvPr id="73" name="mleaf:e17c8f5b-124a-538d-8210-832d1d49cd0d"/>
           <p:cNvSpPr/>
           <p:nvPr/>
         </p:nvSpPr>
@@ -9261,7 +9261,7 @@
       </p:sp>
       <p:sp>
         <p:nvSpPr>
-          <p:cNvPr id="74" name="ox:b06ff99a-fe58-5d2a-b929-271cce54c60c"/>
+          <p:cNvPr id="74" name="mleaf:b06ff99a-fe58-5d2a-b929-271cce54c60c"/>
           <p:cNvSpPr/>
           <p:nvPr/>
         </p:nvSpPr>
@@ -9320,7 +9320,7 @@
       </p:sp>
       <p:pic>
         <p:nvPicPr>
-          <p:cNvPr id="75" name="ox:6dcc2557-f941-5d0a-8286-25fa9a8bb8c3" descr="mark.png"/>
+          <p:cNvPr id="75" name="mleaf:6dcc2557-f941-5d0a-8286-25fa9a8bb8c3" descr="mark.png"/>
           <p:cNvPicPr/>
           <p:nvPr/>
         </p:nvPicPr>
@@ -9373,7 +9373,7 @@
       </p:grpSpPr>
       <p:sp>
         <p:nvSpPr>
-          <p:cNvPr id="76" name="ox:5df6afb0-d370-595c-9bb5-a4427b92acb7"/>
+          <p:cNvPr id="76" name="mleaf:5df6afb0-d370-595c-9bb5-a4427b92acb7"/>
           <p:cNvSpPr/>
           <p:nvPr/>
         </p:nvSpPr>
@@ -9429,7 +9429,7 @@
       </p:sp>
       <p:sp>
         <p:nvSpPr>
-          <p:cNvPr id="77" name="ox:2c3e6ccb-8456-5c29-94ea-c27cd4bbf21f"/>
+          <p:cNvPr id="77" name="mleaf:2c3e6ccb-8456-5c29-94ea-c27cd4bbf21f"/>
           <p:cNvSpPr/>
           <p:nvPr/>
         </p:nvSpPr>
@@ -9672,7 +9672,7 @@
       </p:grpSpPr>
       <p:sp>
         <p:nvSpPr>
-          <p:cNvPr id="78" name="ox:87145175-ada9-53e8-87bb-7ae36098a209"/>
+          <p:cNvPr id="78" name="mleaf:87145175-ada9-53e8-87bb-7ae36098a209"/>
           <p:cNvSpPr/>
           <p:nvPr/>
         </p:nvSpPr>
@@ -9728,7 +9728,7 @@
       </p:sp>
       <p:sp>
         <p:nvSpPr>
-          <p:cNvPr id="79" name="ox:d08f732f-2569-5de9-bd79-71c56621940e"/>
+          <p:cNvPr id="79" name="mleaf:d08f732f-2569-5de9-bd79-71c56621940e"/>
           <p:cNvSpPr/>
           <p:nvPr/>
         </p:nvSpPr>
@@ -9789,7 +9789,7 @@
       </p:sp>
       <p:graphicFrame>
         <p:nvGraphicFramePr>
-          <p:cNvPr id="80" name="ox:c13a316c-a4e6-54d1-ba22-3d1990e38814"/>
+          <p:cNvPr id="80" name="mleaf:c13a316c-a4e6-54d1-ba22-3d1990e38814"/>
           <p:cNvGraphicFramePr/>
           <p:nvPr/>
         </p:nvGraphicFramePr>
@@ -10494,7 +10494,7 @@
       </p:grpSpPr>
       <p:sp>
         <p:nvSpPr>
-          <p:cNvPr id="81" name="ox:112d1341-5f3b-5774-b9f9-c9c8124aa696"/>
+          <p:cNvPr id="81" name="mleaf:112d1341-5f3b-5774-b9f9-c9c8124aa696"/>
           <p:cNvSpPr/>
           <p:nvPr/>
         </p:nvSpPr>
@@ -10550,7 +10550,7 @@
       </p:sp>
       <p:sp>
         <p:nvSpPr>
-          <p:cNvPr id="82" name="ox:fe89d69a-83d4-5679-a3d3-ccad43f16ace"/>
+          <p:cNvPr id="82" name="mleaf:fe89d69a-83d4-5679-a3d3-ccad43f16ace"/>
           <p:cNvSpPr/>
           <p:nvPr/>
         </p:nvSpPr>
@@ -10613,7 +10613,7 @@
       </p:sp>
       <p:sp>
         <p:nvSpPr>
-          <p:cNvPr id="83" name="ox:70cfccb9-8743-5ee2-8d22-d3833a134ac8"/>
+          <p:cNvPr id="83" name="mleaf:70cfccb9-8743-5ee2-8d22-d3833a134ac8"/>
           <p:cNvSpPr/>
           <p:nvPr/>
         </p:nvSpPr>
@@ -10676,7 +10676,7 @@
       </p:sp>
       <p:sp>
         <p:nvSpPr>
-          <p:cNvPr id="84" name="ox:3d3b2f75-54d3-5bd3-8ff9-2a9378bc2943"/>
+          <p:cNvPr id="84" name="mleaf:3d3b2f75-54d3-5bd3-8ff9-2a9378bc2943"/>
           <p:cNvSpPr/>
           <p:nvPr/>
         </p:nvSpPr>
@@ -10739,7 +10739,7 @@
       </p:sp>
       <p:sp>
         <p:nvSpPr>
-          <p:cNvPr id="85" name="ox:b66f34d0-0949-5c9c-819a-5041c656bd48"/>
+          <p:cNvPr id="85" name="mleaf:b66f34d0-0949-5c9c-819a-5041c656bd48"/>
           <p:cNvSpPr/>
           <p:nvPr/>
         </p:nvSpPr>
@@ -10802,7 +10802,7 @@
       </p:sp>
       <p:cxnSp>
         <p:nvCxnSpPr>
-          <p:cNvPr id="86" name="ox:e8b48068-ea77-586c-ab43-627cb00f233d"/>
+          <p:cNvPr id="86" name="mleaf:e8b48068-ea77-586c-ab43-627cb00f233d"/>
           <p:cNvCxnSpPr>
             <a:stCxn id="82" idx="3"/>
             <a:endCxn id="83" idx="1"/>
@@ -10828,7 +10828,7 @@
       </p:cxnSp>
       <p:cxnSp>
         <p:nvCxnSpPr>
-          <p:cNvPr id="87" name="ox:0229f7e3-cbf1-5f84-8efb-30ffee4db22b"/>
+          <p:cNvPr id="87" name="mleaf:0229f7e3-cbf1-5f84-8efb-30ffee4db22b"/>
           <p:cNvCxnSpPr>
             <a:stCxn id="83" idx="3"/>
             <a:endCxn id="84" idx="1"/>
@@ -10854,7 +10854,7 @@
       </p:cxnSp>
       <p:cxnSp>
         <p:nvCxnSpPr>
-          <p:cNvPr id="88" name="ox:763fe3e3-fef1-5f8a-8a43-26372e2391ba"/>
+          <p:cNvPr id="88" name="mleaf:763fe3e3-fef1-5f8a-8a43-26372e2391ba"/>
           <p:cNvCxnSpPr>
             <a:stCxn id="84" idx="3"/>
             <a:endCxn id="85" idx="1"/>
@@ -10880,7 +10880,7 @@
       </p:cxnSp>
       <p:cxnSp>
         <p:nvCxnSpPr>
-          <p:cNvPr id="89" name="ox:ab78373f-7016-55cb-9826-f9af625bb9ae"/>
+          <p:cNvPr id="89" name="mleaf:ab78373f-7016-55cb-9826-f9af625bb9ae"/>
           <p:cNvCxnSpPr/>
           <p:nvPr/>
         </p:nvCxnSpPr>
@@ -10933,7 +10933,7 @@
       </p:grpSpPr>
       <p:sp>
         <p:nvSpPr>
-          <p:cNvPr id="90" name="ox:a4853a04-5b4d-5543-96ac-05ef78137a1b"/>
+          <p:cNvPr id="90" name="mleaf:a4853a04-5b4d-5543-96ac-05ef78137a1b"/>
           <p:cNvSpPr/>
           <p:nvPr/>
         </p:nvSpPr>
@@ -11019,7 +11019,7 @@
       </p:grpSpPr>
       <p:sp>
         <p:nvSpPr>
-          <p:cNvPr id="91" name="ox:1c3f0704-0f0a-589e-95fa-7282b64fdcef"/>
+          <p:cNvPr id="91" name="mleaf:1c3f0704-0f0a-589e-95fa-7282b64fdcef"/>
           <p:cNvSpPr/>
           <p:nvPr/>
         </p:nvSpPr>
@@ -11105,7 +11105,7 @@
       </p:grpSpPr>
       <p:sp>
         <p:nvSpPr>
-          <p:cNvPr id="92" name="ox:3931a9cf-2762-58da-8f6b-4844649bda74"/>
+          <p:cNvPr id="92" name="mleaf:3931a9cf-2762-58da-8f6b-4844649bda74"/>
           <p:cNvSpPr/>
           <p:nvPr/>
         </p:nvSpPr>
@@ -11161,7 +11161,7 @@
       </p:sp>
       <p:pic>
         <p:nvPicPr>
-          <p:cNvPr id="93" name="ox:535f73ca-aa6c-563e-bc0a-7f2ebb8a8725" descr="chart.jpg"/>
+          <p:cNvPr id="93" name="mleaf:535f73ca-aa6c-563e-bc0a-7f2ebb8a8725" descr="chart.jpg"/>
           <p:cNvPicPr/>
           <p:nvPr/>
         </p:nvPicPr>
@@ -11185,7 +11185,7 @@
       </p:pic>
       <p:sp>
         <p:nvSpPr>
-          <p:cNvPr id="94" name="ox:a79d358b-948a-58de-8699-2d23702ab6f6"/>
+          <p:cNvPr id="94" name="mleaf:a79d358b-948a-58de-8699-2d23702ab6f6"/>
           <p:cNvSpPr/>
           <p:nvPr/>
         </p:nvSpPr>
@@ -11274,7 +11274,7 @@
       </p:grpSpPr>
       <p:sp>
         <p:nvSpPr>
-          <p:cNvPr id="95" name="ox:783617a4-9f7d-5fb8-b072-ad493db17293"/>
+          <p:cNvPr id="95" name="mleaf:783617a4-9f7d-5fb8-b072-ad493db17293"/>
           <p:cNvSpPr/>
           <p:nvPr/>
         </p:nvSpPr>
@@ -11330,7 +11330,7 @@
       </p:sp>
       <p:sp>
         <p:nvSpPr>
-          <p:cNvPr id="96" name="ox:194a2640-dc98-5c48-83a4-6e5a553640c9"/>
+          <p:cNvPr id="96" name="mleaf:194a2640-dc98-5c48-83a4-6e5a553640c9"/>
           <p:cNvSpPr/>
           <p:nvPr/>
         </p:nvSpPr>
@@ -11389,7 +11389,7 @@
       </p:sp>
       <p:sp>
         <p:nvSpPr>
-          <p:cNvPr id="97" name="ox:9681ce91-66e6-5999-98a0-e1988d51754e"/>
+          <p:cNvPr id="97" name="mleaf:9681ce91-66e6-5999-98a0-e1988d51754e"/>
           <p:cNvSpPr/>
           <p:nvPr/>
         </p:nvSpPr>
@@ -11448,7 +11448,7 @@
       </p:sp>
       <p:graphicFrame>
         <p:nvGraphicFramePr>
-          <p:cNvPr id="98" name="ox:9a9d4429-ffc4-514f-bd70-68ca13e2bfb1"/>
+          <p:cNvPr id="98" name="mleaf:9a9d4429-ffc4-514f-bd70-68ca13e2bfb1"/>
           <p:cNvGraphicFramePr/>
           <p:nvPr/>
         </p:nvGraphicFramePr>
@@ -11854,7 +11854,7 @@
       </p:grpSpPr>
       <p:sp>
         <p:nvSpPr>
-          <p:cNvPr id="99" name="ox:119b3989-72c9-50df-ae8e-4dbc13d49f4e"/>
+          <p:cNvPr id="99" name="mleaf:119b3989-72c9-50df-ae8e-4dbc13d49f4e"/>
           <p:cNvSpPr/>
           <p:nvPr/>
         </p:nvSpPr>
@@ -11910,7 +11910,7 @@
       </p:sp>
       <p:sp>
         <p:nvSpPr>
-          <p:cNvPr id="100" name="ox:52cb8aaf-58b4-557a-bb3c-ec7236b79f07"/>
+          <p:cNvPr id="100" name="mleaf:52cb8aaf-58b4-557a-bb3c-ec7236b79f07"/>
           <p:cNvSpPr/>
           <p:nvPr/>
         </p:nvSpPr>
@@ -12000,7 +12000,7 @@
       </p:sp>
       <p:pic>
         <p:nvPicPr>
-          <p:cNvPr id="101" name="ox:b7e5fa70-def2-5cf6-bac7-32a86718c29c" descr="mark.png"/>
+          <p:cNvPr id="101" name="mleaf:b7e5fa70-def2-5cf6-bac7-32a86718c29c" descr="mark.png"/>
           <p:cNvPicPr/>
           <p:nvPr/>
         </p:nvPicPr>

--- a/examples/real/fixtures/milleleaf-deck.libreoffice-resaved.pptx
+++ b/examples/real/fixtures/milleleaf-deck.libreoffice-resaved.pptx
@@ -356,7 +356,7 @@
             <a:pPr indent="0" algn="r">
               <a:buNone/>
             </a:pPr>
-            <a:fld id="{8AE0E684-77EB-4783-9F4A-F1FF19E85E15}" type="slidenum">
+            <a:fld id="{8FF819DF-FF66-4F6E-B375-5FA1255CE957}" type="slidenum">
               <a:rPr b="0" lang="en-US" sz="1400" spc="-1" strike="noStrike">
                 <a:solidFill>
                   <a:srgbClr val="000000"/>
@@ -1384,7 +1384,7 @@
         <p:txBody>
           <a:bodyPr/>
           <a:p>
-            <a:fld id="{009E2D14-0416-4921-9A40-1E10B88A9EFF}" type="slidenum">
+            <a:fld id="{DC1057D5-72B4-46D9-A282-AB4CB0BBF128}" type="slidenum">
               <a:t>&lt;#&gt;</a:t>
             </a:fld>
           </a:p>
@@ -1467,7 +1467,7 @@
         <p:txBody>
           <a:bodyPr/>
           <a:p>
-            <a:fld id="{E1602B4B-6317-4BD1-9C36-83B25EBCAF6B}" type="slidenum">
+            <a:fld id="{464D09C7-5F45-4E02-9825-C0EAF6432812}" type="slidenum">
               <a:t>&lt;#&gt;</a:t>
             </a:fld>
           </a:p>
@@ -1550,7 +1550,7 @@
         <p:txBody>
           <a:bodyPr/>
           <a:p>
-            <a:fld id="{B793309D-650A-4186-86F4-E438285C45F9}" type="slidenum">
+            <a:fld id="{89396828-177F-471A-B6E1-D4C42EA60005}" type="slidenum">
               <a:t>&lt;#&gt;</a:t>
             </a:fld>
           </a:p>
@@ -1633,7 +1633,7 @@
         <p:txBody>
           <a:bodyPr/>
           <a:p>
-            <a:fld id="{05DF8EE0-6484-44CD-9096-706B26A297C4}" type="slidenum">
+            <a:fld id="{B31B5195-0823-4065-A71E-AE915C55CF62}" type="slidenum">
               <a:t>&lt;#&gt;</a:t>
             </a:fld>
           </a:p>
@@ -1716,7 +1716,7 @@
         <p:txBody>
           <a:bodyPr/>
           <a:p>
-            <a:fld id="{F6BB5F23-2A61-4F8B-A4A0-DB7BB76C4F48}" type="slidenum">
+            <a:fld id="{4DD7D9C7-1F49-42CB-A98B-901C12F073BF}" type="slidenum">
               <a:t>&lt;#&gt;</a:t>
             </a:fld>
           </a:p>
@@ -1885,7 +1885,7 @@
         <p:txBody>
           <a:bodyPr/>
           <a:p>
-            <a:fld id="{49BAC58C-76D4-4604-8628-5DE22CD331D2}" type="slidenum">
+            <a:fld id="{15EA9DF2-5202-4FDA-80F8-68927B9F7510}" type="slidenum">
               <a:t>&lt;#&gt;</a:t>
             </a:fld>
           </a:p>
@@ -1968,7 +1968,7 @@
         <p:txBody>
           <a:bodyPr/>
           <a:p>
-            <a:fld id="{E35D47B7-E68D-4411-AC5E-287A3D78E530}" type="slidenum">
+            <a:fld id="{35F43CFB-67B0-4D8F-8A59-F39081BB9704}" type="slidenum">
               <a:t>&lt;#&gt;</a:t>
             </a:fld>
           </a:p>
@@ -2183,7 +2183,7 @@
         <p:txBody>
           <a:bodyPr/>
           <a:p>
-            <a:fld id="{7F61F45D-0BC8-490D-A76C-FCC816B5D56C}" type="slidenum">
+            <a:fld id="{5A482073-6A6E-4F14-98BE-7DB6A0C227F4}" type="slidenum">
               <a:t>&lt;#&gt;</a:t>
             </a:fld>
           </a:p>
@@ -2266,7 +2266,7 @@
         <p:txBody>
           <a:bodyPr/>
           <a:p>
-            <a:fld id="{DA30BBDF-793F-4A36-8737-3ADBB2A0C7C7}" type="slidenum">
+            <a:fld id="{F479B7C1-0FAA-46DE-ABD4-98F26D663A6D}" type="slidenum">
               <a:t>&lt;#&gt;</a:t>
             </a:fld>
           </a:p>
@@ -2389,7 +2389,7 @@
         <p:txBody>
           <a:bodyPr/>
           <a:p>
-            <a:fld id="{7AFC8C4C-55E7-49D1-864E-FF9C45466C75}" type="slidenum">
+            <a:fld id="{4F9717C4-AB22-4989-9848-C6966D77320E}" type="slidenum">
               <a:t>&lt;#&gt;</a:t>
             </a:fld>
           </a:p>
@@ -2472,7 +2472,7 @@
         <p:txBody>
           <a:bodyPr/>
           <a:p>
-            <a:fld id="{D2A530E7-D63C-4076-83CC-53B1E633BF96}" type="slidenum">
+            <a:fld id="{7B38A25A-CD64-4288-8415-C3048CAAB829}" type="slidenum">
               <a:t>&lt;#&gt;</a:t>
             </a:fld>
           </a:p>
@@ -2747,7 +2747,7 @@
               </a:lnSpc>
               <a:buNone/>
             </a:pPr>
-            <a:fld id="{F3CFF85F-4A13-4F85-8070-08F20299DE1F}" type="slidenum">
+            <a:fld id="{0079E31C-0695-4DB3-85AA-D06E498C85BE}" type="slidenum">
               <a:rPr b="0" lang="en-US" sz="1200" spc="-1" strike="noStrike">
                 <a:solidFill>
                   <a:schemeClr val="dk1">
@@ -3511,7 +3511,7 @@
               </a:lnSpc>
               <a:buNone/>
             </a:pPr>
-            <a:fld id="{FE6D4A4D-B31F-4FF6-9486-008B2A2C51A2}" type="slidenum">
+            <a:fld id="{8BEAEBF1-A3AE-41F5-94DD-E800BF26AF49}" type="slidenum">
               <a:rPr b="0" lang="en-US" sz="1200" spc="-1" strike="noStrike">
                 <a:solidFill>
                   <a:schemeClr val="dk1">
@@ -4275,7 +4275,7 @@
               </a:lnSpc>
               <a:buNone/>
             </a:pPr>
-            <a:fld id="{1756C377-C0BE-4C8E-9502-8C0609B2AE3F}" type="slidenum">
+            <a:fld id="{0CFE21A8-C546-4EF4-9877-2BD36FD420CC}" type="slidenum">
               <a:rPr b="0" lang="en-US" sz="1200" spc="-1" strike="noStrike">
                 <a:solidFill>
                   <a:schemeClr val="dk1">
@@ -4793,7 +4793,7 @@
               </a:lnSpc>
               <a:buNone/>
             </a:pPr>
-            <a:fld id="{17ADBB32-B0C8-43CE-A992-2EDABD609D51}" type="slidenum">
+            <a:fld id="{A3614B3B-F4F7-4287-8E59-9A7D5B46F0B7}" type="slidenum">
               <a:rPr b="0" lang="en-US" sz="1200" spc="-1" strike="noStrike">
                 <a:solidFill>
                   <a:schemeClr val="dk1">
@@ -5311,7 +5311,7 @@
               </a:lnSpc>
               <a:buNone/>
             </a:pPr>
-            <a:fld id="{C8DE6E53-A683-43BB-96A8-F25C518DA883}" type="slidenum">
+            <a:fld id="{43438675-58B7-4B55-8552-C4657CD49572}" type="slidenum">
               <a:rPr b="0" lang="en-US" sz="1200" spc="-1" strike="noStrike">
                 <a:solidFill>
                   <a:schemeClr val="dk1">
@@ -5829,7 +5829,7 @@
               </a:lnSpc>
               <a:buNone/>
             </a:pPr>
-            <a:fld id="{663BFF36-9B0D-4A20-9463-548C95D7EAC7}" type="slidenum">
+            <a:fld id="{B7B3E021-4E18-40ED-A3D3-B0830DE50B72}" type="slidenum">
               <a:rPr b="0" lang="en-US" sz="1200" spc="-1" strike="noStrike">
                 <a:solidFill>
                   <a:schemeClr val="dk1">
@@ -6347,7 +6347,7 @@
               </a:lnSpc>
               <a:buNone/>
             </a:pPr>
-            <a:fld id="{BA2B1586-6C7E-42DB-9E55-B19A912BD4E2}" type="slidenum">
+            <a:fld id="{82AED8A1-F0A5-4ED7-8613-0FA6BBAD2D9A}" type="slidenum">
               <a:rPr b="0" lang="en-US" sz="1200" spc="-1" strike="noStrike">
                 <a:solidFill>
                   <a:schemeClr val="dk1">
@@ -7111,7 +7111,7 @@
               </a:lnSpc>
               <a:buNone/>
             </a:pPr>
-            <a:fld id="{525CE9C7-B8DB-4DA7-B91F-C776CA429DFB}" type="slidenum">
+            <a:fld id="{BA834E48-A552-4764-AAEF-78CE0CFD56E2}" type="slidenum">
               <a:rPr b="0" lang="en-US" sz="1200" spc="-1" strike="noStrike">
                 <a:solidFill>
                   <a:schemeClr val="dk1">
@@ -8367,7 +8367,7 @@
               </a:lnSpc>
               <a:buNone/>
             </a:pPr>
-            <a:fld id="{98F42929-1A13-4DE3-92CA-920505C2DA0E}" type="slidenum">
+            <a:fld id="{D346AB9D-05F0-425B-9F89-C9CB83E69BA8}" type="slidenum">
               <a:rPr b="0" lang="en-US" sz="1200" spc="-1" strike="noStrike">
                 <a:solidFill>
                   <a:schemeClr val="dk1">
@@ -8639,7 +8639,7 @@
               </a:lnSpc>
               <a:buNone/>
             </a:pPr>
-            <a:fld id="{18C80DD9-1815-4145-B6A0-078FCBDA74B4}" type="slidenum">
+            <a:fld id="{231C32F5-46BD-4348-AB6C-5207E2A77CD0}" type="slidenum">
               <a:rPr b="0" lang="en-US" sz="1200" spc="-1" strike="noStrike">
                 <a:solidFill>
                   <a:schemeClr val="dk1">
@@ -8862,7 +8862,7 @@
               </a:lnSpc>
               <a:buNone/>
             </a:pPr>
-            <a:fld id="{839B73CA-85AD-4A3C-85D0-454FD28D1494}" type="slidenum">
+            <a:fld id="{70DE2A26-4071-4AE8-BD55-9E7649AC52CA}" type="slidenum">
               <a:rPr b="0" lang="en-US" sz="1200" spc="-1" strike="noStrike">
                 <a:solidFill>
                   <a:schemeClr val="dk1">
